--- a/docs/instructions/Greek/EU_SAE_Workbench_Guide_3_Estimating_Poverty_and_Welfare_GR.pptx
+++ b/docs/instructions/Greek/EU_SAE_Workbench_Guide_3_Estimating_Poverty_and_Welfare_GR.pptx
@@ -1366,7 +1366,7 @@
           <a:p>
             <a:r>
               <a:rPr lang="el-GR"/>
-              <a:t>Στόχος είναι η αριθμητική μέση ευημερία. Το UFH log εφαρμόζει την επιλεγμένη μέθοδο στις διακυμάνσεις δέλτα V/mean^2· προεπιλέγεται sm_all, ενώ direct και sm_out διατίθενται και αποθηκεύονται. Το MFH προεπιλέγει sm_all / rho_sm_all στη λογαριθμική κλίμακα. Το προαιρετικό όριο sm_out παραμένει 0,001 σε αυτή την κλίμακα. Διορθωμένες προβλέψεις UFH δεν είναι διαθέσιμες χωρίς άμεση εκτίμηση· το none επιστρέφει exp(eta). Τα παλαιότερα αποτελέσματα διατηρούν τις προηγούμενες ρυθμίσεις.</a:t>
+              <a:t>Στόχος είναι η αριθμητική μέση ευημερία. Το UFH log εφαρμόζει την επιλεγμένη μέθοδο στις διακυμάνσεις δέλτα V/mean^2· προεπιλέγεται sm_out, ενώ direct και sm_all διατίθενται και αποθηκεύονται. Το MFH προεπιλέγει sm_out / rho_sm_out στη λογαριθμική κλίμακα. Το όριο sm_out παραμένει 0,001 σε αυτή την κλίμακα. Διορθωμένες προβλέψεις UFH δεν είναι διαθέσιμες χωρίς άμεση εκτίμηση· το none επιστρέφει exp(eta). Τα παλαιότερα αποτελέσματα διατηρούν τις προηγούμενες ρυθμίσεις.</a:t>
             </a:r>
             <a:endParaRPr lang="el-GR"/>
           </a:p>
@@ -2246,7 +2246,7 @@
           <a:p>
             <a:r>
               <a:rPr lang="el-GR"/>
-              <a:t>Το UFH FGT0 arcsin διατηρεί την αναλυτική διακύμανση βάσει αποτελεσματικού μεγέθους δείγματος· όταν το μέγεθος αυτό είναι μη έγκυρο, χρησιμοποιείται το παρατηρούμενο μέγεθος δείγματος. Το UFH χωρίς μετασχηματισμό χρησιμοποιεί εξ ορισμού sm_all. Το MFH προεπιλέγει sm_all με rho_sm_all. Το προαιρετικό sm_out αντικαθιστά μόνο ελλείπουσες, μη πεπερασμένες ή αυστηρά κάτω του 0,001 διακυμάνσεις· δεν αντικαθιστά μεγάλες διακυμάνσεις. Οι ρητά αποθηκευμένες επιλογές παραμένουν έγκυρες. Στα όρια του επιτρεπτού εύρους η σημαντικότητα της μεταβολής παραμένει προσωρινή. Τα παλαιότερα παραδείγματα w5o χρησιμοποίησαν sm_out / rho_sm_out και 100 επαναλήψεις.</a:t>
+              <a:t>Το UFH FGT0 arcsin διατηρεί την αναλυτική διακύμανση βάσει αποτελεσματικού μεγέθους δείγματος· όταν το μέγεθος αυτό είναι μη έγκυρο, χρησιμοποιείται το παρατηρούμενο μέγεθος δείγματος. Το UFH χωρίς μετασχηματισμό χρησιμοποιεί εξ ορισμού sm_out. Το MFH προεπιλέγει sm_out με rho_sm_out. Το sm_out αντικαθιστά μόνο ελλείπουσες, μη πεπερασμένες ή αυστηρά κάτω του 0,001 διακυμάνσεις· δεν αντικαθιστά μεγάλες διακυμάνσεις. Το προαιρετικό sm_all αντικαθιστά όλες τις διακυμάνσεις με προβλέψεις GVF που βασίζονται μόνο στο μέγεθος του δείγματος, κάτι που μπορεί να υπερεκτιμά τις διακυμάνσεις περιοχών με χαμηλή φτώχεια και να κάνει τα RMSE του MFH σχεδόν σταθερά (Ενότητα 6.6 των οδηγιών). Οι ρητά αποθηκευμένες επιλογές παραμένουν έγκυρες. Στα όρια του επιτρεπτού εύρους η σημαντικότητα της μεταβολής παραμένει προσωρινή. Τα παλαιότερα παραδείγματα w5o χρησιμοποίησαν sm_out / rho_sm_out και 100 επαναλήψεις.</a:t>
             </a:r>
             <a:endParaRPr lang="el-GR"/>
           </a:p>
@@ -12204,7 +12204,7 @@
                           <a:ea typeface="Calibri" pitchFamily="34" charset="-122"/>
                           <a:cs typeface="Calibri" pitchFamily="34" charset="-120"/>
                         </a:rPr>
-                        <a:t>sm_all</a:t>
+                        <a:t>sm_out</a:t>
                       </a:r>
                       <a:endParaRPr lang="el-GR" sz="1200">
                         <a:latin typeface="Calibri" charset="0"/>
@@ -12272,7 +12272,7 @@
                           <a:ea typeface="Calibri" pitchFamily="34" charset="-122"/>
                           <a:cs typeface="Calibri" pitchFamily="34" charset="-120"/>
                         </a:rPr>
-                        <a:t>Το UFH log εφαρμόζει την επιλογή· το MFH χρησιμοποιεί rho_sm_all</a:t>
+                        <a:t>Το UFH log εφαρμόζει την επιλογή· το MFH χρησιμοποιεί rho_sm_out</a:t>
                       </a:r>
                       <a:endParaRPr lang="el-GR" sz="1200">
                         <a:latin typeface="Calibri" charset="0"/>
@@ -12569,7 +12569,7 @@
                   <a:srgbClr val="5B6B86"/>
                 </a:solidFill>
               </a:rPr>
-              <a:t>Παλαιότερο w5o: sm_out / rho_sm_out, 100 επαναλήψεις. Οι νέες προεπιλογές δεν εκτελέστηκαν.</a:t>
+              <a:t>Παλαιότερο w5o: sm_out / rho_sm_out (τρέχουσες προεπιλογές), 100 επαναλήψεις.</a:t>
             </a:r>
             <a:endParaRPr lang="el-GR" sz="1400"/>
           </a:p>
@@ -20171,7 +20171,7 @@
                           <a:ea typeface="Calibri" pitchFamily="34" charset="-122"/>
                           <a:cs typeface="Calibri" pitchFamily="34" charset="-120"/>
                         </a:rPr>
-                        <a:t>sm_all, rho_sm_all</a:t>
+                        <a:t>sm_out, rho_sm_out</a:t>
                       </a:r>
                       <a:endParaRPr lang="el-GR" sz="1200">
                         <a:latin typeface="Calibri" charset="0"/>
@@ -20239,7 +20239,7 @@
                           <a:ea typeface="Calibri" pitchFamily="34" charset="-122"/>
                           <a:cs typeface="Calibri" pitchFamily="34" charset="-120"/>
                         </a:rPr>
-                        <a:t>Πλήρης εξομάλυνση διακυμάνσεων εργασίας με εθνική συσχέτιση σφαλμάτων δειγματοληψίας</a:t>
+                        <a:t>Άμεσες διακυμάνσεις (GVF κάτω του 0,001) με εθνική συσχέτιση σφαλμάτων δειγματοληψίας</a:t>
                       </a:r>
                       <a:endParaRPr lang="el-GR" sz="1200">
                         <a:latin typeface="Calibri" charset="0"/>
@@ -20948,7 +20948,7 @@
                   <a:srgbClr val="5B6B86"/>
                 </a:solidFill>
               </a:rPr>
-              <a:t>Παλαιότερο w5o: sm_out / rho_sm_out, 100 επαναλήψεις. Δεν είναι αποτελέσματα των νέων προεπιλογών.</a:t>
+              <a:t>Παλαιότερο w5o: sm_out / rho_sm_out (τρέχουσες προεπιλογές), 100 επαναλήψεις.</a:t>
             </a:r>
             <a:endParaRPr lang="el-GR" sz="1400"/>
           </a:p>

--- a/docs/instructions/Greek/EU_SAE_Workbench_Guide_3_Estimating_Poverty_and_Welfare_GR.pptx
+++ b/docs/instructions/Greek/EU_SAE_Workbench_Guide_3_Estimating_Poverty_and_Welfare_GR.pptx
@@ -9450,19 +9450,13 @@
               <a:buSzPct val="100000"/>
               <a:buChar char="•"/>
             </a:pPr>
-            <a:pPr indent="0" marL="0">
-              <a:spcAft>
-                <a:spcPts val="600"/>
-              </a:spcAft>
-              <a:buNone/>
-            </a:pPr>
             <a:r>
               <a:rPr lang="el-GR" sz="1250" b="1">
                 <a:solidFill>
                   <a:srgbClr val="16233D"/>
                 </a:solidFill>
               </a:rPr>
-              <a:t xml:space="preserve">Σταθερός δείκτης: </a:t>
+              <a:t>Σταθερός δείκτης: </a:t>
             </a:r>
             <a:r>
               <a:rPr lang="el-GR" sz="1250">
@@ -9482,19 +9476,13 @@
               <a:buSzPct val="100000"/>
               <a:buChar char="•"/>
             </a:pPr>
-            <a:pPr indent="0" marL="0">
-              <a:spcAft>
-                <a:spcPts val="600"/>
-              </a:spcAft>
-              <a:buNone/>
-            </a:pPr>
             <a:r>
               <a:rPr lang="el-GR" sz="1250" b="1">
                 <a:solidFill>
                   <a:srgbClr val="16233D"/>
                 </a:solidFill>
               </a:rPr>
-              <a:t xml:space="preserve">Ετήσιες μορφές: </a:t>
+              <a:t>Ετήσιες μορφές: </a:t>
             </a:r>
             <a:r>
               <a:rPr lang="el-GR" sz="1250">
@@ -9514,19 +9502,13 @@
               <a:buSzPct val="100000"/>
               <a:buChar char="•"/>
             </a:pPr>
-            <a:pPr indent="0" marL="0">
-              <a:spcAft>
-                <a:spcPts val="600"/>
-              </a:spcAft>
-              <a:buNone/>
-            </a:pPr>
             <a:r>
               <a:rPr lang="el-GR" sz="1250" b="1">
                 <a:solidFill>
                   <a:srgbClr val="16233D"/>
                 </a:solidFill>
               </a:rPr>
-              <a:t xml:space="preserve">Αρχείο ΔΤΚ: </a:t>
+              <a:t>Αρχείο ΔΤΚ: </a:t>
             </a:r>
             <a:r>
               <a:rPr lang="el-GR" sz="1250">
@@ -16086,19 +16068,13 @@
               <a:buSzPct val="100000"/>
               <a:buChar char="•"/>
             </a:pPr>
-            <a:pPr indent="0" marL="0">
-              <a:spcAft>
-                <a:spcPts val="600"/>
-              </a:spcAft>
-              <a:buNone/>
-            </a:pPr>
             <a:r>
               <a:rPr lang="el-GR" sz="1200" b="1">
                 <a:solidFill>
                   <a:srgbClr val="16233D"/>
                 </a:solidFill>
               </a:rPr>
-              <a:t xml:space="preserve">Έκταση αναθεώρησης: </a:t>
+              <a:t>Έκταση αναθεώρησης: </a:t>
             </a:r>
             <a:r>
               <a:rPr lang="el-GR" sz="1200">
@@ -16118,19 +16094,13 @@
               <a:buSzPct val="100000"/>
               <a:buChar char="•"/>
             </a:pPr>
-            <a:pPr indent="0" marL="0">
-              <a:spcAft>
-                <a:spcPts val="600"/>
-              </a:spcAft>
-              <a:buNone/>
-            </a:pPr>
             <a:r>
               <a:rPr lang="el-GR" sz="1200" b="1">
                 <a:solidFill>
                   <a:srgbClr val="16233D"/>
                 </a:solidFill>
               </a:rPr>
-              <a:t xml:space="preserve">Ευθύνη της υπηρεσίας: </a:t>
+              <a:t>Ευθύνη της υπηρεσίας: </a:t>
             </a:r>
             <a:r>
               <a:rPr lang="el-GR" sz="1200">
@@ -16150,19 +16120,13 @@
               <a:buSzPct val="100000"/>
               <a:buChar char="•"/>
             </a:pPr>
-            <a:pPr indent="0" marL="0">
-              <a:spcAft>
-                <a:spcPts val="600"/>
-              </a:spcAft>
-              <a:buNone/>
-            </a:pPr>
             <a:r>
               <a:rPr lang="el-GR" sz="1200" b="1">
                 <a:solidFill>
                   <a:srgbClr val="16233D"/>
                 </a:solidFill>
               </a:rPr>
-              <a:t xml:space="preserve">Αβεβαιότητα μεταβολής: </a:t>
+              <a:t>Αβεβαιότητα μεταβολής: </a:t>
             </a:r>
             <a:r>
               <a:rPr lang="el-GR" sz="1200">
@@ -17912,16 +17876,13 @@
             <a:pPr indent="0" marL="0">
               <a:buNone/>
             </a:pPr>
-            <a:pPr indent="0" marL="0">
-              <a:buNone/>
-            </a:pPr>
             <a:r>
               <a:rPr lang="el-GR" sz="1200" b="1">
                 <a:solidFill>
                   <a:srgbClr val="33415C"/>
                 </a:solidFill>
               </a:rPr>
-              <a:t xml:space="preserve">Μετρούν μόνο οι λόγοι μεταξύ ετών. </a:t>
+              <a:t>Μετρούν μόνο οι λόγοι μεταξύ ετών. </a:t>
             </a:r>
             <a:r>
               <a:rPr lang="el-GR" sz="1200">
@@ -21090,19 +21051,13 @@
               <a:buSzPct val="100000"/>
               <a:buChar char="•"/>
             </a:pPr>
-            <a:pPr indent="0" marL="0">
-              <a:spcAft>
-                <a:spcPts val="600"/>
-              </a:spcAft>
-              <a:buNone/>
-            </a:pPr>
             <a:r>
               <a:rPr lang="el-GR" sz="1200" b="1">
                 <a:solidFill>
                   <a:srgbClr val="16233D"/>
                 </a:solidFill>
               </a:rPr>
-              <a:t xml:space="preserve">Γραμμές: </a:t>
+              <a:t>Γραμμές: </a:t>
             </a:r>
             <a:r>
               <a:rPr lang="el-GR" sz="1200">
@@ -21122,19 +21077,13 @@
               <a:buSzPct val="100000"/>
               <a:buChar char="•"/>
             </a:pPr>
-            <a:pPr indent="0" marL="0">
-              <a:spcAft>
-                <a:spcPts val="600"/>
-              </a:spcAft>
-              <a:buNone/>
-            </a:pPr>
             <a:r>
               <a:rPr lang="el-GR" sz="1200" b="1">
                 <a:solidFill>
                   <a:srgbClr val="16233D"/>
                 </a:solidFill>
               </a:rPr>
-              <a:t xml:space="preserve">Μεταβολές: </a:t>
+              <a:t>Μεταβολές: </a:t>
             </a:r>
             <a:r>
               <a:rPr lang="el-GR" sz="1200">
@@ -21154,19 +21103,13 @@
               <a:buSzPct val="100000"/>
               <a:buChar char="•"/>
             </a:pPr>
-            <a:pPr indent="0" marL="0">
-              <a:spcAft>
-                <a:spcPts val="600"/>
-              </a:spcAft>
-              <a:buNone/>
-            </a:pPr>
             <a:r>
               <a:rPr lang="el-GR" sz="1200" b="1">
                 <a:solidFill>
                   <a:srgbClr val="16233D"/>
                 </a:solidFill>
               </a:rPr>
-              <a:t xml:space="preserve">Αρχεία: </a:t>
+              <a:t>Αρχεία: </a:t>
             </a:r>
             <a:r>
               <a:rPr lang="el-GR" sz="1200">
